--- a/public/videos/repositories/hotpapi01/hotpapi01-tech-preview.pptx
+++ b/public/videos/repositories/hotpapi01/hotpapi01-tech-preview.pptx
@@ -134,7 +134,7 @@
           <p:cNvPr id="2" name="タイトル 1">
             <a:extLst>
               <a:ext uri="{FF2B5EF4-FFF2-40B4-BE49-F238E27FC236}">
-                <a16:creationId xmlns:a16="http://schemas.microsoft.com/office/drawing/2014/main" id="{25CDC041-C6FB-1D04-817B-34CC07980EBA}"/>
+                <a16:creationId xmlns:a16="http://schemas.microsoft.com/office/drawing/2014/main" id="{31802045-85EB-D9D3-2833-9834F1AFB13C}"/>
               </a:ext>
             </a:extLst>
           </p:cNvPr>
@@ -171,7 +171,7 @@
           <p:cNvPr id="3" name="字幕 2">
             <a:extLst>
               <a:ext uri="{FF2B5EF4-FFF2-40B4-BE49-F238E27FC236}">
-                <a16:creationId xmlns:a16="http://schemas.microsoft.com/office/drawing/2014/main" id="{74B5CB2F-D32E-1A1F-F009-EF8CBF6890CE}"/>
+                <a16:creationId xmlns:a16="http://schemas.microsoft.com/office/drawing/2014/main" id="{F5741435-0A92-D010-CC72-8CD364F29B70}"/>
               </a:ext>
             </a:extLst>
           </p:cNvPr>
@@ -241,7 +241,7 @@
           <p:cNvPr id="4" name="日付プレースホルダー 3">
             <a:extLst>
               <a:ext uri="{FF2B5EF4-FFF2-40B4-BE49-F238E27FC236}">
-                <a16:creationId xmlns:a16="http://schemas.microsoft.com/office/drawing/2014/main" id="{7573C2F3-FE38-DACB-0B88-C6F26F346CF3}"/>
+                <a16:creationId xmlns:a16="http://schemas.microsoft.com/office/drawing/2014/main" id="{F0ED6AB9-7889-D495-475F-2EC2467D80F3}"/>
               </a:ext>
             </a:extLst>
           </p:cNvPr>
@@ -257,7 +257,7 @@
           <a:bodyPr/>
           <a:lstStyle/>
           <a:p>
-            <a:fld id="{9DF2A836-37ED-47CA-87A4-683513FCBB30}" type="datetimeFigureOut">
+            <a:fld id="{C1E45F56-CE77-4E74-8606-E77503B817BF}" type="datetimeFigureOut">
               <a:rPr kumimoji="1" lang="ja-JP" altLang="en-US" smtClean="0"/>
               <a:t>2026/7/30</a:t>
             </a:fld>
@@ -270,7 +270,7 @@
           <p:cNvPr id="5" name="フッター プレースホルダー 4">
             <a:extLst>
               <a:ext uri="{FF2B5EF4-FFF2-40B4-BE49-F238E27FC236}">
-                <a16:creationId xmlns:a16="http://schemas.microsoft.com/office/drawing/2014/main" id="{DA689DBE-BE25-392C-F9AD-BE665B8CCE9C}"/>
+                <a16:creationId xmlns:a16="http://schemas.microsoft.com/office/drawing/2014/main" id="{40B3AB71-E836-82C8-18FF-B913B694EB91}"/>
               </a:ext>
             </a:extLst>
           </p:cNvPr>
@@ -295,7 +295,7 @@
           <p:cNvPr id="6" name="スライド番号プレースホルダー 5">
             <a:extLst>
               <a:ext uri="{FF2B5EF4-FFF2-40B4-BE49-F238E27FC236}">
-                <a16:creationId xmlns:a16="http://schemas.microsoft.com/office/drawing/2014/main" id="{F03F8E66-705E-F017-01BB-3AD63D07D788}"/>
+                <a16:creationId xmlns:a16="http://schemas.microsoft.com/office/drawing/2014/main" id="{BF9E6905-B991-9308-14AD-227104A39B55}"/>
               </a:ext>
             </a:extLst>
           </p:cNvPr>
@@ -311,7 +311,7 @@
           <a:bodyPr/>
           <a:lstStyle/>
           <a:p>
-            <a:fld id="{5F14EB4C-AC86-462B-B0D6-21F83665B7A5}" type="slidenum">
+            <a:fld id="{E2AC0EA4-A78B-42AF-AA75-2A56FB8ECFD9}" type="slidenum">
               <a:rPr kumimoji="1" lang="ja-JP" altLang="en-US" smtClean="0"/>
               <a:t>‹#›</a:t>
             </a:fld>
@@ -322,7 +322,7 @@
     </p:spTree>
     <p:extLst>
       <p:ext uri="{BB962C8B-B14F-4D97-AF65-F5344CB8AC3E}">
-        <p14:creationId xmlns:p14="http://schemas.microsoft.com/office/powerpoint/2010/main" val="1764836893"/>
+        <p14:creationId xmlns:p14="http://schemas.microsoft.com/office/powerpoint/2010/main" val="3813297856"/>
       </p:ext>
     </p:extLst>
   </p:cSld>
@@ -354,7 +354,7 @@
           <p:cNvPr id="2" name="タイトル 1">
             <a:extLst>
               <a:ext uri="{FF2B5EF4-FFF2-40B4-BE49-F238E27FC236}">
-                <a16:creationId xmlns:a16="http://schemas.microsoft.com/office/drawing/2014/main" id="{E51551EC-AC7C-3723-2E39-3CE061F6F317}"/>
+                <a16:creationId xmlns:a16="http://schemas.microsoft.com/office/drawing/2014/main" id="{4CC5EB94-BABD-C772-858E-30E2714B6CAD}"/>
               </a:ext>
             </a:extLst>
           </p:cNvPr>
@@ -382,7 +382,7 @@
           <p:cNvPr id="3" name="縦書きテキスト プレースホルダー 2">
             <a:extLst>
               <a:ext uri="{FF2B5EF4-FFF2-40B4-BE49-F238E27FC236}">
-                <a16:creationId xmlns:a16="http://schemas.microsoft.com/office/drawing/2014/main" id="{66475F83-274F-7324-CD8E-B6B0428F685C}"/>
+                <a16:creationId xmlns:a16="http://schemas.microsoft.com/office/drawing/2014/main" id="{79F33CB7-1CD3-DE90-F17D-7D21CC67E0B5}"/>
               </a:ext>
             </a:extLst>
           </p:cNvPr>
@@ -471,7 +471,7 @@
           <p:cNvPr id="4" name="日付プレースホルダー 3">
             <a:extLst>
               <a:ext uri="{FF2B5EF4-FFF2-40B4-BE49-F238E27FC236}">
-                <a16:creationId xmlns:a16="http://schemas.microsoft.com/office/drawing/2014/main" id="{E1FB2EA0-A13F-C7F5-CF56-E52A3C072CF2}"/>
+                <a16:creationId xmlns:a16="http://schemas.microsoft.com/office/drawing/2014/main" id="{37ADEC19-DF06-661F-0434-21DA5B67226E}"/>
               </a:ext>
             </a:extLst>
           </p:cNvPr>
@@ -487,7 +487,7 @@
           <a:bodyPr/>
           <a:lstStyle/>
           <a:p>
-            <a:fld id="{9DF2A836-37ED-47CA-87A4-683513FCBB30}" type="datetimeFigureOut">
+            <a:fld id="{C1E45F56-CE77-4E74-8606-E77503B817BF}" type="datetimeFigureOut">
               <a:rPr kumimoji="1" lang="ja-JP" altLang="en-US" smtClean="0"/>
               <a:t>2026/7/30</a:t>
             </a:fld>
@@ -500,7 +500,7 @@
           <p:cNvPr id="5" name="フッター プレースホルダー 4">
             <a:extLst>
               <a:ext uri="{FF2B5EF4-FFF2-40B4-BE49-F238E27FC236}">
-                <a16:creationId xmlns:a16="http://schemas.microsoft.com/office/drawing/2014/main" id="{8CFEE5E5-DEB4-BC20-1F1B-A1F736E86FC9}"/>
+                <a16:creationId xmlns:a16="http://schemas.microsoft.com/office/drawing/2014/main" id="{287FFDB1-6C8B-D34C-5D01-7FEE44C42A3F}"/>
               </a:ext>
             </a:extLst>
           </p:cNvPr>
@@ -525,7 +525,7 @@
           <p:cNvPr id="6" name="スライド番号プレースホルダー 5">
             <a:extLst>
               <a:ext uri="{FF2B5EF4-FFF2-40B4-BE49-F238E27FC236}">
-                <a16:creationId xmlns:a16="http://schemas.microsoft.com/office/drawing/2014/main" id="{802AE116-BA30-F1CD-AF2F-A356FB515454}"/>
+                <a16:creationId xmlns:a16="http://schemas.microsoft.com/office/drawing/2014/main" id="{C956E32C-D1F2-1F50-C8D7-9A91C4F4F348}"/>
               </a:ext>
             </a:extLst>
           </p:cNvPr>
@@ -541,7 +541,7 @@
           <a:bodyPr/>
           <a:lstStyle/>
           <a:p>
-            <a:fld id="{5F14EB4C-AC86-462B-B0D6-21F83665B7A5}" type="slidenum">
+            <a:fld id="{E2AC0EA4-A78B-42AF-AA75-2A56FB8ECFD9}" type="slidenum">
               <a:rPr kumimoji="1" lang="ja-JP" altLang="en-US" smtClean="0"/>
               <a:t>‹#›</a:t>
             </a:fld>
@@ -552,7 +552,7 @@
     </p:spTree>
     <p:extLst>
       <p:ext uri="{BB962C8B-B14F-4D97-AF65-F5344CB8AC3E}">
-        <p14:creationId xmlns:p14="http://schemas.microsoft.com/office/powerpoint/2010/main" val="1136499912"/>
+        <p14:creationId xmlns:p14="http://schemas.microsoft.com/office/powerpoint/2010/main" val="827227003"/>
       </p:ext>
     </p:extLst>
   </p:cSld>
@@ -584,7 +584,7 @@
           <p:cNvPr id="2" name="縦書きタイトル 1">
             <a:extLst>
               <a:ext uri="{FF2B5EF4-FFF2-40B4-BE49-F238E27FC236}">
-                <a16:creationId xmlns:a16="http://schemas.microsoft.com/office/drawing/2014/main" id="{3BC176C2-1150-0013-4745-88FCFBE4A420}"/>
+                <a16:creationId xmlns:a16="http://schemas.microsoft.com/office/drawing/2014/main" id="{1C8DE2BC-70BC-78A9-030A-153BE0CE3809}"/>
               </a:ext>
             </a:extLst>
           </p:cNvPr>
@@ -617,7 +617,7 @@
           <p:cNvPr id="3" name="縦書きテキスト プレースホルダー 2">
             <a:extLst>
               <a:ext uri="{FF2B5EF4-FFF2-40B4-BE49-F238E27FC236}">
-                <a16:creationId xmlns:a16="http://schemas.microsoft.com/office/drawing/2014/main" id="{12ED08FD-5529-7411-6A0B-96814EA18133}"/>
+                <a16:creationId xmlns:a16="http://schemas.microsoft.com/office/drawing/2014/main" id="{E925E983-3095-DC72-4F9A-0BC32C8F1B1D}"/>
               </a:ext>
             </a:extLst>
           </p:cNvPr>
@@ -711,7 +711,7 @@
           <p:cNvPr id="4" name="日付プレースホルダー 3">
             <a:extLst>
               <a:ext uri="{FF2B5EF4-FFF2-40B4-BE49-F238E27FC236}">
-                <a16:creationId xmlns:a16="http://schemas.microsoft.com/office/drawing/2014/main" id="{9963D84B-5D46-BE19-A599-3E050BACE30E}"/>
+                <a16:creationId xmlns:a16="http://schemas.microsoft.com/office/drawing/2014/main" id="{EEA59ADF-D31F-04A5-B1DE-E16D724E7714}"/>
               </a:ext>
             </a:extLst>
           </p:cNvPr>
@@ -727,7 +727,7 @@
           <a:bodyPr/>
           <a:lstStyle/>
           <a:p>
-            <a:fld id="{9DF2A836-37ED-47CA-87A4-683513FCBB30}" type="datetimeFigureOut">
+            <a:fld id="{C1E45F56-CE77-4E74-8606-E77503B817BF}" type="datetimeFigureOut">
               <a:rPr kumimoji="1" lang="ja-JP" altLang="en-US" smtClean="0"/>
               <a:t>2026/7/30</a:t>
             </a:fld>
@@ -740,7 +740,7 @@
           <p:cNvPr id="5" name="フッター プレースホルダー 4">
             <a:extLst>
               <a:ext uri="{FF2B5EF4-FFF2-40B4-BE49-F238E27FC236}">
-                <a16:creationId xmlns:a16="http://schemas.microsoft.com/office/drawing/2014/main" id="{83F88C77-F372-E2FE-2393-698E65B09846}"/>
+                <a16:creationId xmlns:a16="http://schemas.microsoft.com/office/drawing/2014/main" id="{50A99524-135B-025A-E782-A24D62DCE331}"/>
               </a:ext>
             </a:extLst>
           </p:cNvPr>
@@ -765,7 +765,7 @@
           <p:cNvPr id="6" name="スライド番号プレースホルダー 5">
             <a:extLst>
               <a:ext uri="{FF2B5EF4-FFF2-40B4-BE49-F238E27FC236}">
-                <a16:creationId xmlns:a16="http://schemas.microsoft.com/office/drawing/2014/main" id="{FE06AEDF-4E59-5AC7-0719-999F6B2C5F85}"/>
+                <a16:creationId xmlns:a16="http://schemas.microsoft.com/office/drawing/2014/main" id="{46095785-9787-5B7E-FC6F-227C8555B527}"/>
               </a:ext>
             </a:extLst>
           </p:cNvPr>
@@ -781,7 +781,7 @@
           <a:bodyPr/>
           <a:lstStyle/>
           <a:p>
-            <a:fld id="{5F14EB4C-AC86-462B-B0D6-21F83665B7A5}" type="slidenum">
+            <a:fld id="{E2AC0EA4-A78B-42AF-AA75-2A56FB8ECFD9}" type="slidenum">
               <a:rPr kumimoji="1" lang="ja-JP" altLang="en-US" smtClean="0"/>
               <a:t>‹#›</a:t>
             </a:fld>
@@ -792,7 +792,7 @@
     </p:spTree>
     <p:extLst>
       <p:ext uri="{BB962C8B-B14F-4D97-AF65-F5344CB8AC3E}">
-        <p14:creationId xmlns:p14="http://schemas.microsoft.com/office/powerpoint/2010/main" val="2389241293"/>
+        <p14:creationId xmlns:p14="http://schemas.microsoft.com/office/powerpoint/2010/main" val="2049641921"/>
       </p:ext>
     </p:extLst>
   </p:cSld>
@@ -824,7 +824,7 @@
           <p:cNvPr id="2" name="タイトル 1">
             <a:extLst>
               <a:ext uri="{FF2B5EF4-FFF2-40B4-BE49-F238E27FC236}">
-                <a16:creationId xmlns:a16="http://schemas.microsoft.com/office/drawing/2014/main" id="{A34A158B-CA0E-F49C-73A0-5987F4FF5BBB}"/>
+                <a16:creationId xmlns:a16="http://schemas.microsoft.com/office/drawing/2014/main" id="{B0BCAFDE-ECA7-1EE6-0866-426C9E1B9E7D}"/>
               </a:ext>
             </a:extLst>
           </p:cNvPr>
@@ -852,7 +852,7 @@
           <p:cNvPr id="3" name="コンテンツ プレースホルダー 2">
             <a:extLst>
               <a:ext uri="{FF2B5EF4-FFF2-40B4-BE49-F238E27FC236}">
-                <a16:creationId xmlns:a16="http://schemas.microsoft.com/office/drawing/2014/main" id="{6C4FB935-71AA-037B-AE5E-91EB9417CD94}"/>
+                <a16:creationId xmlns:a16="http://schemas.microsoft.com/office/drawing/2014/main" id="{20CF7439-8D69-7C46-9B72-090EA597069D}"/>
               </a:ext>
             </a:extLst>
           </p:cNvPr>
@@ -941,7 +941,7 @@
           <p:cNvPr id="4" name="日付プレースホルダー 3">
             <a:extLst>
               <a:ext uri="{FF2B5EF4-FFF2-40B4-BE49-F238E27FC236}">
-                <a16:creationId xmlns:a16="http://schemas.microsoft.com/office/drawing/2014/main" id="{576C8670-2CFE-8CCC-5BB3-6893DB60BC4F}"/>
+                <a16:creationId xmlns:a16="http://schemas.microsoft.com/office/drawing/2014/main" id="{A0FE6B20-C591-F4CF-A7E2-3376553620EF}"/>
               </a:ext>
             </a:extLst>
           </p:cNvPr>
@@ -957,7 +957,7 @@
           <a:bodyPr/>
           <a:lstStyle/>
           <a:p>
-            <a:fld id="{9DF2A836-37ED-47CA-87A4-683513FCBB30}" type="datetimeFigureOut">
+            <a:fld id="{C1E45F56-CE77-4E74-8606-E77503B817BF}" type="datetimeFigureOut">
               <a:rPr kumimoji="1" lang="ja-JP" altLang="en-US" smtClean="0"/>
               <a:t>2026/7/30</a:t>
             </a:fld>
@@ -970,7 +970,7 @@
           <p:cNvPr id="5" name="フッター プレースホルダー 4">
             <a:extLst>
               <a:ext uri="{FF2B5EF4-FFF2-40B4-BE49-F238E27FC236}">
-                <a16:creationId xmlns:a16="http://schemas.microsoft.com/office/drawing/2014/main" id="{6A5F88ED-02D0-BAE6-DD8A-58360361F36D}"/>
+                <a16:creationId xmlns:a16="http://schemas.microsoft.com/office/drawing/2014/main" id="{A3B14826-C1B5-0AB7-1309-2E7BD10C1DB6}"/>
               </a:ext>
             </a:extLst>
           </p:cNvPr>
@@ -995,7 +995,7 @@
           <p:cNvPr id="6" name="スライド番号プレースホルダー 5">
             <a:extLst>
               <a:ext uri="{FF2B5EF4-FFF2-40B4-BE49-F238E27FC236}">
-                <a16:creationId xmlns:a16="http://schemas.microsoft.com/office/drawing/2014/main" id="{30C072D9-B78D-097A-1C50-F3E016E22121}"/>
+                <a16:creationId xmlns:a16="http://schemas.microsoft.com/office/drawing/2014/main" id="{3EB6323D-B308-EA80-64F9-9D8ECCDD7809}"/>
               </a:ext>
             </a:extLst>
           </p:cNvPr>
@@ -1011,7 +1011,7 @@
           <a:bodyPr/>
           <a:lstStyle/>
           <a:p>
-            <a:fld id="{5F14EB4C-AC86-462B-B0D6-21F83665B7A5}" type="slidenum">
+            <a:fld id="{E2AC0EA4-A78B-42AF-AA75-2A56FB8ECFD9}" type="slidenum">
               <a:rPr kumimoji="1" lang="ja-JP" altLang="en-US" smtClean="0"/>
               <a:t>‹#›</a:t>
             </a:fld>
@@ -1022,7 +1022,7 @@
     </p:spTree>
     <p:extLst>
       <p:ext uri="{BB962C8B-B14F-4D97-AF65-F5344CB8AC3E}">
-        <p14:creationId xmlns:p14="http://schemas.microsoft.com/office/powerpoint/2010/main" val="2226124678"/>
+        <p14:creationId xmlns:p14="http://schemas.microsoft.com/office/powerpoint/2010/main" val="2624170768"/>
       </p:ext>
     </p:extLst>
   </p:cSld>
@@ -1054,7 +1054,7 @@
           <p:cNvPr id="2" name="タイトル 1">
             <a:extLst>
               <a:ext uri="{FF2B5EF4-FFF2-40B4-BE49-F238E27FC236}">
-                <a16:creationId xmlns:a16="http://schemas.microsoft.com/office/drawing/2014/main" id="{00C5052B-0C7D-68AA-DCAE-23A90322E91C}"/>
+                <a16:creationId xmlns:a16="http://schemas.microsoft.com/office/drawing/2014/main" id="{0A41367A-CC4C-76E9-323F-02DD9D012634}"/>
               </a:ext>
             </a:extLst>
           </p:cNvPr>
@@ -1091,7 +1091,7 @@
           <p:cNvPr id="3" name="テキスト プレースホルダー 2">
             <a:extLst>
               <a:ext uri="{FF2B5EF4-FFF2-40B4-BE49-F238E27FC236}">
-                <a16:creationId xmlns:a16="http://schemas.microsoft.com/office/drawing/2014/main" id="{EF599E71-E48E-9A13-C739-1CCB02E4C170}"/>
+                <a16:creationId xmlns:a16="http://schemas.microsoft.com/office/drawing/2014/main" id="{C4540D1F-F22C-BD88-CECD-1BA005CABF68}"/>
               </a:ext>
             </a:extLst>
           </p:cNvPr>
@@ -1216,7 +1216,7 @@
           <p:cNvPr id="4" name="日付プレースホルダー 3">
             <a:extLst>
               <a:ext uri="{FF2B5EF4-FFF2-40B4-BE49-F238E27FC236}">
-                <a16:creationId xmlns:a16="http://schemas.microsoft.com/office/drawing/2014/main" id="{7F528ACD-5A58-8A71-434B-0A2124A67921}"/>
+                <a16:creationId xmlns:a16="http://schemas.microsoft.com/office/drawing/2014/main" id="{FA30773D-CD1E-1EA8-5D96-F9718124307F}"/>
               </a:ext>
             </a:extLst>
           </p:cNvPr>
@@ -1232,7 +1232,7 @@
           <a:bodyPr/>
           <a:lstStyle/>
           <a:p>
-            <a:fld id="{9DF2A836-37ED-47CA-87A4-683513FCBB30}" type="datetimeFigureOut">
+            <a:fld id="{C1E45F56-CE77-4E74-8606-E77503B817BF}" type="datetimeFigureOut">
               <a:rPr kumimoji="1" lang="ja-JP" altLang="en-US" smtClean="0"/>
               <a:t>2026/7/30</a:t>
             </a:fld>
@@ -1245,7 +1245,7 @@
           <p:cNvPr id="5" name="フッター プレースホルダー 4">
             <a:extLst>
               <a:ext uri="{FF2B5EF4-FFF2-40B4-BE49-F238E27FC236}">
-                <a16:creationId xmlns:a16="http://schemas.microsoft.com/office/drawing/2014/main" id="{1ACD91D9-B809-9C1A-04BB-B918CA145D95}"/>
+                <a16:creationId xmlns:a16="http://schemas.microsoft.com/office/drawing/2014/main" id="{6A206176-C551-D568-4B3A-4E78D026F9EB}"/>
               </a:ext>
             </a:extLst>
           </p:cNvPr>
@@ -1270,7 +1270,7 @@
           <p:cNvPr id="6" name="スライド番号プレースホルダー 5">
             <a:extLst>
               <a:ext uri="{FF2B5EF4-FFF2-40B4-BE49-F238E27FC236}">
-                <a16:creationId xmlns:a16="http://schemas.microsoft.com/office/drawing/2014/main" id="{74EC3E44-E114-4DFE-58F9-4BC0912CD589}"/>
+                <a16:creationId xmlns:a16="http://schemas.microsoft.com/office/drawing/2014/main" id="{9FFCF292-9B56-B03D-4179-BC34DC6D4065}"/>
               </a:ext>
             </a:extLst>
           </p:cNvPr>
@@ -1286,7 +1286,7 @@
           <a:bodyPr/>
           <a:lstStyle/>
           <a:p>
-            <a:fld id="{5F14EB4C-AC86-462B-B0D6-21F83665B7A5}" type="slidenum">
+            <a:fld id="{E2AC0EA4-A78B-42AF-AA75-2A56FB8ECFD9}" type="slidenum">
               <a:rPr kumimoji="1" lang="ja-JP" altLang="en-US" smtClean="0"/>
               <a:t>‹#›</a:t>
             </a:fld>
@@ -1297,7 +1297,7 @@
     </p:spTree>
     <p:extLst>
       <p:ext uri="{BB962C8B-B14F-4D97-AF65-F5344CB8AC3E}">
-        <p14:creationId xmlns:p14="http://schemas.microsoft.com/office/powerpoint/2010/main" val="173487366"/>
+        <p14:creationId xmlns:p14="http://schemas.microsoft.com/office/powerpoint/2010/main" val="629872187"/>
       </p:ext>
     </p:extLst>
   </p:cSld>
@@ -1329,7 +1329,7 @@
           <p:cNvPr id="2" name="タイトル 1">
             <a:extLst>
               <a:ext uri="{FF2B5EF4-FFF2-40B4-BE49-F238E27FC236}">
-                <a16:creationId xmlns:a16="http://schemas.microsoft.com/office/drawing/2014/main" id="{C70D3FBA-F507-48CB-A6DA-2CCFE8C8ED42}"/>
+                <a16:creationId xmlns:a16="http://schemas.microsoft.com/office/drawing/2014/main" id="{801ED3D6-EC73-4A81-1F4A-F6A42FECE50E}"/>
               </a:ext>
             </a:extLst>
           </p:cNvPr>
@@ -1357,7 +1357,7 @@
           <p:cNvPr id="3" name="コンテンツ プレースホルダー 2">
             <a:extLst>
               <a:ext uri="{FF2B5EF4-FFF2-40B4-BE49-F238E27FC236}">
-                <a16:creationId xmlns:a16="http://schemas.microsoft.com/office/drawing/2014/main" id="{B8EB4CF7-ABD5-777A-AE85-5BA04099BB3C}"/>
+                <a16:creationId xmlns:a16="http://schemas.microsoft.com/office/drawing/2014/main" id="{E1ADBDE5-88DF-CCE2-712E-EFA8EC5DF419}"/>
               </a:ext>
             </a:extLst>
           </p:cNvPr>
@@ -1451,7 +1451,7 @@
           <p:cNvPr id="4" name="コンテンツ プレースホルダー 3">
             <a:extLst>
               <a:ext uri="{FF2B5EF4-FFF2-40B4-BE49-F238E27FC236}">
-                <a16:creationId xmlns:a16="http://schemas.microsoft.com/office/drawing/2014/main" id="{863D795F-B4B4-AD61-C8EA-AEB10770BD88}"/>
+                <a16:creationId xmlns:a16="http://schemas.microsoft.com/office/drawing/2014/main" id="{0EA12772-B881-0057-9503-A4334AA37CF3}"/>
               </a:ext>
             </a:extLst>
           </p:cNvPr>
@@ -1545,7 +1545,7 @@
           <p:cNvPr id="5" name="日付プレースホルダー 4">
             <a:extLst>
               <a:ext uri="{FF2B5EF4-FFF2-40B4-BE49-F238E27FC236}">
-                <a16:creationId xmlns:a16="http://schemas.microsoft.com/office/drawing/2014/main" id="{06381D0D-1BEF-52A0-44F1-22D55CEE377D}"/>
+                <a16:creationId xmlns:a16="http://schemas.microsoft.com/office/drawing/2014/main" id="{60F9E157-F21F-C8C3-36A8-C09E86DF1D73}"/>
               </a:ext>
             </a:extLst>
           </p:cNvPr>
@@ -1561,7 +1561,7 @@
           <a:bodyPr/>
           <a:lstStyle/>
           <a:p>
-            <a:fld id="{9DF2A836-37ED-47CA-87A4-683513FCBB30}" type="datetimeFigureOut">
+            <a:fld id="{C1E45F56-CE77-4E74-8606-E77503B817BF}" type="datetimeFigureOut">
               <a:rPr kumimoji="1" lang="ja-JP" altLang="en-US" smtClean="0"/>
               <a:t>2026/7/30</a:t>
             </a:fld>
@@ -1574,7 +1574,7 @@
           <p:cNvPr id="6" name="フッター プレースホルダー 5">
             <a:extLst>
               <a:ext uri="{FF2B5EF4-FFF2-40B4-BE49-F238E27FC236}">
-                <a16:creationId xmlns:a16="http://schemas.microsoft.com/office/drawing/2014/main" id="{C221FBE1-EC00-A9D5-808F-08F1541495D7}"/>
+                <a16:creationId xmlns:a16="http://schemas.microsoft.com/office/drawing/2014/main" id="{101C808D-F9BA-795D-A9F9-A1F3F499E8C1}"/>
               </a:ext>
             </a:extLst>
           </p:cNvPr>
@@ -1599,7 +1599,7 @@
           <p:cNvPr id="7" name="スライド番号プレースホルダー 6">
             <a:extLst>
               <a:ext uri="{FF2B5EF4-FFF2-40B4-BE49-F238E27FC236}">
-                <a16:creationId xmlns:a16="http://schemas.microsoft.com/office/drawing/2014/main" id="{4C42D6C8-D447-062B-F437-79A6A4E6CD6B}"/>
+                <a16:creationId xmlns:a16="http://schemas.microsoft.com/office/drawing/2014/main" id="{1EEB47F1-108E-EA8B-CB6E-EDB180F149F0}"/>
               </a:ext>
             </a:extLst>
           </p:cNvPr>
@@ -1615,7 +1615,7 @@
           <a:bodyPr/>
           <a:lstStyle/>
           <a:p>
-            <a:fld id="{5F14EB4C-AC86-462B-B0D6-21F83665B7A5}" type="slidenum">
+            <a:fld id="{E2AC0EA4-A78B-42AF-AA75-2A56FB8ECFD9}" type="slidenum">
               <a:rPr kumimoji="1" lang="ja-JP" altLang="en-US" smtClean="0"/>
               <a:t>‹#›</a:t>
             </a:fld>
@@ -1626,7 +1626,7 @@
     </p:spTree>
     <p:extLst>
       <p:ext uri="{BB962C8B-B14F-4D97-AF65-F5344CB8AC3E}">
-        <p14:creationId xmlns:p14="http://schemas.microsoft.com/office/powerpoint/2010/main" val="2395303190"/>
+        <p14:creationId xmlns:p14="http://schemas.microsoft.com/office/powerpoint/2010/main" val="1268456784"/>
       </p:ext>
     </p:extLst>
   </p:cSld>
@@ -1658,7 +1658,7 @@
           <p:cNvPr id="2" name="タイトル 1">
             <a:extLst>
               <a:ext uri="{FF2B5EF4-FFF2-40B4-BE49-F238E27FC236}">
-                <a16:creationId xmlns:a16="http://schemas.microsoft.com/office/drawing/2014/main" id="{F931B46F-67C7-5F30-3B09-92BFF81DE196}"/>
+                <a16:creationId xmlns:a16="http://schemas.microsoft.com/office/drawing/2014/main" id="{0E7AE673-98C7-C653-7E92-6A9851D342F9}"/>
               </a:ext>
             </a:extLst>
           </p:cNvPr>
@@ -1691,7 +1691,7 @@
           <p:cNvPr id="3" name="テキスト プレースホルダー 2">
             <a:extLst>
               <a:ext uri="{FF2B5EF4-FFF2-40B4-BE49-F238E27FC236}">
-                <a16:creationId xmlns:a16="http://schemas.microsoft.com/office/drawing/2014/main" id="{37827F6D-B7BC-EAE4-39D3-3BAACAD2665A}"/>
+                <a16:creationId xmlns:a16="http://schemas.microsoft.com/office/drawing/2014/main" id="{7D791036-A431-CF45-7B5A-7314294F9711}"/>
               </a:ext>
             </a:extLst>
           </p:cNvPr>
@@ -1762,7 +1762,7 @@
           <p:cNvPr id="4" name="コンテンツ プレースホルダー 3">
             <a:extLst>
               <a:ext uri="{FF2B5EF4-FFF2-40B4-BE49-F238E27FC236}">
-                <a16:creationId xmlns:a16="http://schemas.microsoft.com/office/drawing/2014/main" id="{65428AA9-97BA-39B9-1EEE-C58614E09E01}"/>
+                <a16:creationId xmlns:a16="http://schemas.microsoft.com/office/drawing/2014/main" id="{3B42269F-EB85-8541-9C4D-3CDB35C08D17}"/>
               </a:ext>
             </a:extLst>
           </p:cNvPr>
@@ -1856,7 +1856,7 @@
           <p:cNvPr id="5" name="テキスト プレースホルダー 4">
             <a:extLst>
               <a:ext uri="{FF2B5EF4-FFF2-40B4-BE49-F238E27FC236}">
-                <a16:creationId xmlns:a16="http://schemas.microsoft.com/office/drawing/2014/main" id="{6AC0A1DC-BB9E-AE1A-00D7-5ED0F0456961}"/>
+                <a16:creationId xmlns:a16="http://schemas.microsoft.com/office/drawing/2014/main" id="{6D583FD0-3559-FEC0-964C-0F81FBACF299}"/>
               </a:ext>
             </a:extLst>
           </p:cNvPr>
@@ -1927,7 +1927,7 @@
           <p:cNvPr id="6" name="コンテンツ プレースホルダー 5">
             <a:extLst>
               <a:ext uri="{FF2B5EF4-FFF2-40B4-BE49-F238E27FC236}">
-                <a16:creationId xmlns:a16="http://schemas.microsoft.com/office/drawing/2014/main" id="{61E79832-C941-91C4-7B84-74E2A8EB767D}"/>
+                <a16:creationId xmlns:a16="http://schemas.microsoft.com/office/drawing/2014/main" id="{44F3202C-F294-B00B-0C82-33853D3D20D3}"/>
               </a:ext>
             </a:extLst>
           </p:cNvPr>
@@ -2021,7 +2021,7 @@
           <p:cNvPr id="7" name="日付プレースホルダー 6">
             <a:extLst>
               <a:ext uri="{FF2B5EF4-FFF2-40B4-BE49-F238E27FC236}">
-                <a16:creationId xmlns:a16="http://schemas.microsoft.com/office/drawing/2014/main" id="{4A6EE196-79AD-7B3F-27B2-326041DB4C64}"/>
+                <a16:creationId xmlns:a16="http://schemas.microsoft.com/office/drawing/2014/main" id="{42DFB202-86FB-9EB1-BBCE-D75B1C3CA817}"/>
               </a:ext>
             </a:extLst>
           </p:cNvPr>
@@ -2037,7 +2037,7 @@
           <a:bodyPr/>
           <a:lstStyle/>
           <a:p>
-            <a:fld id="{9DF2A836-37ED-47CA-87A4-683513FCBB30}" type="datetimeFigureOut">
+            <a:fld id="{C1E45F56-CE77-4E74-8606-E77503B817BF}" type="datetimeFigureOut">
               <a:rPr kumimoji="1" lang="ja-JP" altLang="en-US" smtClean="0"/>
               <a:t>2026/7/30</a:t>
             </a:fld>
@@ -2050,7 +2050,7 @@
           <p:cNvPr id="8" name="フッター プレースホルダー 7">
             <a:extLst>
               <a:ext uri="{FF2B5EF4-FFF2-40B4-BE49-F238E27FC236}">
-                <a16:creationId xmlns:a16="http://schemas.microsoft.com/office/drawing/2014/main" id="{633C9CCC-1C2D-F392-3155-90B150523F92}"/>
+                <a16:creationId xmlns:a16="http://schemas.microsoft.com/office/drawing/2014/main" id="{EFCC9F62-86FE-C28F-48FC-B1D805E2C4AE}"/>
               </a:ext>
             </a:extLst>
           </p:cNvPr>
@@ -2075,7 +2075,7 @@
           <p:cNvPr id="9" name="スライド番号プレースホルダー 8">
             <a:extLst>
               <a:ext uri="{FF2B5EF4-FFF2-40B4-BE49-F238E27FC236}">
-                <a16:creationId xmlns:a16="http://schemas.microsoft.com/office/drawing/2014/main" id="{6CF16821-E697-F944-1E0A-C49F7C07638B}"/>
+                <a16:creationId xmlns:a16="http://schemas.microsoft.com/office/drawing/2014/main" id="{5F1FD415-6331-85FA-E4CC-808F789F139C}"/>
               </a:ext>
             </a:extLst>
           </p:cNvPr>
@@ -2091,7 +2091,7 @@
           <a:bodyPr/>
           <a:lstStyle/>
           <a:p>
-            <a:fld id="{5F14EB4C-AC86-462B-B0D6-21F83665B7A5}" type="slidenum">
+            <a:fld id="{E2AC0EA4-A78B-42AF-AA75-2A56FB8ECFD9}" type="slidenum">
               <a:rPr kumimoji="1" lang="ja-JP" altLang="en-US" smtClean="0"/>
               <a:t>‹#›</a:t>
             </a:fld>
@@ -2102,7 +2102,7 @@
     </p:spTree>
     <p:extLst>
       <p:ext uri="{BB962C8B-B14F-4D97-AF65-F5344CB8AC3E}">
-        <p14:creationId xmlns:p14="http://schemas.microsoft.com/office/powerpoint/2010/main" val="1059396635"/>
+        <p14:creationId xmlns:p14="http://schemas.microsoft.com/office/powerpoint/2010/main" val="4028167693"/>
       </p:ext>
     </p:extLst>
   </p:cSld>
@@ -2134,7 +2134,7 @@
           <p:cNvPr id="2" name="タイトル 1">
             <a:extLst>
               <a:ext uri="{FF2B5EF4-FFF2-40B4-BE49-F238E27FC236}">
-                <a16:creationId xmlns:a16="http://schemas.microsoft.com/office/drawing/2014/main" id="{85A4ED1E-4A43-76B7-6BB9-94A5C4DEFC63}"/>
+                <a16:creationId xmlns:a16="http://schemas.microsoft.com/office/drawing/2014/main" id="{120E1913-5948-AEC5-82CE-192E9F184B35}"/>
               </a:ext>
             </a:extLst>
           </p:cNvPr>
@@ -2162,7 +2162,7 @@
           <p:cNvPr id="3" name="日付プレースホルダー 2">
             <a:extLst>
               <a:ext uri="{FF2B5EF4-FFF2-40B4-BE49-F238E27FC236}">
-                <a16:creationId xmlns:a16="http://schemas.microsoft.com/office/drawing/2014/main" id="{7F2A9F2C-F83F-732B-4538-E102430080D7}"/>
+                <a16:creationId xmlns:a16="http://schemas.microsoft.com/office/drawing/2014/main" id="{D455BC25-DB4E-DCC5-DEDD-9E8B50D32D33}"/>
               </a:ext>
             </a:extLst>
           </p:cNvPr>
@@ -2178,7 +2178,7 @@
           <a:bodyPr/>
           <a:lstStyle/>
           <a:p>
-            <a:fld id="{9DF2A836-37ED-47CA-87A4-683513FCBB30}" type="datetimeFigureOut">
+            <a:fld id="{C1E45F56-CE77-4E74-8606-E77503B817BF}" type="datetimeFigureOut">
               <a:rPr kumimoji="1" lang="ja-JP" altLang="en-US" smtClean="0"/>
               <a:t>2026/7/30</a:t>
             </a:fld>
@@ -2191,7 +2191,7 @@
           <p:cNvPr id="4" name="フッター プレースホルダー 3">
             <a:extLst>
               <a:ext uri="{FF2B5EF4-FFF2-40B4-BE49-F238E27FC236}">
-                <a16:creationId xmlns:a16="http://schemas.microsoft.com/office/drawing/2014/main" id="{2BF403DF-482C-5442-4CE6-EFD80C5BEE2C}"/>
+                <a16:creationId xmlns:a16="http://schemas.microsoft.com/office/drawing/2014/main" id="{E2C76B9A-8199-9331-6A72-57C1EC31378E}"/>
               </a:ext>
             </a:extLst>
           </p:cNvPr>
@@ -2216,7 +2216,7 @@
           <p:cNvPr id="5" name="スライド番号プレースホルダー 4">
             <a:extLst>
               <a:ext uri="{FF2B5EF4-FFF2-40B4-BE49-F238E27FC236}">
-                <a16:creationId xmlns:a16="http://schemas.microsoft.com/office/drawing/2014/main" id="{D4E9EE5C-0B6E-79AB-B629-25D15AE1585A}"/>
+                <a16:creationId xmlns:a16="http://schemas.microsoft.com/office/drawing/2014/main" id="{7414555B-9682-295D-674A-EE8BE8BE1BAF}"/>
               </a:ext>
             </a:extLst>
           </p:cNvPr>
@@ -2232,7 +2232,7 @@
           <a:bodyPr/>
           <a:lstStyle/>
           <a:p>
-            <a:fld id="{5F14EB4C-AC86-462B-B0D6-21F83665B7A5}" type="slidenum">
+            <a:fld id="{E2AC0EA4-A78B-42AF-AA75-2A56FB8ECFD9}" type="slidenum">
               <a:rPr kumimoji="1" lang="ja-JP" altLang="en-US" smtClean="0"/>
               <a:t>‹#›</a:t>
             </a:fld>
@@ -2243,7 +2243,7 @@
     </p:spTree>
     <p:extLst>
       <p:ext uri="{BB962C8B-B14F-4D97-AF65-F5344CB8AC3E}">
-        <p14:creationId xmlns:p14="http://schemas.microsoft.com/office/powerpoint/2010/main" val="3977020450"/>
+        <p14:creationId xmlns:p14="http://schemas.microsoft.com/office/powerpoint/2010/main" val="707444753"/>
       </p:ext>
     </p:extLst>
   </p:cSld>
@@ -2275,7 +2275,7 @@
           <p:cNvPr id="2" name="日付プレースホルダー 1">
             <a:extLst>
               <a:ext uri="{FF2B5EF4-FFF2-40B4-BE49-F238E27FC236}">
-                <a16:creationId xmlns:a16="http://schemas.microsoft.com/office/drawing/2014/main" id="{BFC651E8-E377-6DE7-F5F1-65CC688F7CAA}"/>
+                <a16:creationId xmlns:a16="http://schemas.microsoft.com/office/drawing/2014/main" id="{DA2CCC98-0009-6A67-116B-1BDB649C6063}"/>
               </a:ext>
             </a:extLst>
           </p:cNvPr>
@@ -2291,7 +2291,7 @@
           <a:bodyPr/>
           <a:lstStyle/>
           <a:p>
-            <a:fld id="{9DF2A836-37ED-47CA-87A4-683513FCBB30}" type="datetimeFigureOut">
+            <a:fld id="{C1E45F56-CE77-4E74-8606-E77503B817BF}" type="datetimeFigureOut">
               <a:rPr kumimoji="1" lang="ja-JP" altLang="en-US" smtClean="0"/>
               <a:t>2026/7/30</a:t>
             </a:fld>
@@ -2304,7 +2304,7 @@
           <p:cNvPr id="3" name="フッター プレースホルダー 2">
             <a:extLst>
               <a:ext uri="{FF2B5EF4-FFF2-40B4-BE49-F238E27FC236}">
-                <a16:creationId xmlns:a16="http://schemas.microsoft.com/office/drawing/2014/main" id="{6B39ADFA-707B-185E-A14D-0DAF84DDAAC3}"/>
+                <a16:creationId xmlns:a16="http://schemas.microsoft.com/office/drawing/2014/main" id="{4E06BEAD-93D9-A0A3-C4CF-6043C6681657}"/>
               </a:ext>
             </a:extLst>
           </p:cNvPr>
@@ -2329,7 +2329,7 @@
           <p:cNvPr id="4" name="スライド番号プレースホルダー 3">
             <a:extLst>
               <a:ext uri="{FF2B5EF4-FFF2-40B4-BE49-F238E27FC236}">
-                <a16:creationId xmlns:a16="http://schemas.microsoft.com/office/drawing/2014/main" id="{9CF3E6D4-0EF4-980C-88EA-45332F4A2721}"/>
+                <a16:creationId xmlns:a16="http://schemas.microsoft.com/office/drawing/2014/main" id="{AFE567B4-9AFF-F929-CE63-F50C8556CC40}"/>
               </a:ext>
             </a:extLst>
           </p:cNvPr>
@@ -2345,7 +2345,7 @@
           <a:bodyPr/>
           <a:lstStyle/>
           <a:p>
-            <a:fld id="{5F14EB4C-AC86-462B-B0D6-21F83665B7A5}" type="slidenum">
+            <a:fld id="{E2AC0EA4-A78B-42AF-AA75-2A56FB8ECFD9}" type="slidenum">
               <a:rPr kumimoji="1" lang="ja-JP" altLang="en-US" smtClean="0"/>
               <a:t>‹#›</a:t>
             </a:fld>
@@ -2356,7 +2356,7 @@
     </p:spTree>
     <p:extLst>
       <p:ext uri="{BB962C8B-B14F-4D97-AF65-F5344CB8AC3E}">
-        <p14:creationId xmlns:p14="http://schemas.microsoft.com/office/powerpoint/2010/main" val="3499384574"/>
+        <p14:creationId xmlns:p14="http://schemas.microsoft.com/office/powerpoint/2010/main" val="2710106651"/>
       </p:ext>
     </p:extLst>
   </p:cSld>
@@ -2388,7 +2388,7 @@
           <p:cNvPr id="2" name="タイトル 1">
             <a:extLst>
               <a:ext uri="{FF2B5EF4-FFF2-40B4-BE49-F238E27FC236}">
-                <a16:creationId xmlns:a16="http://schemas.microsoft.com/office/drawing/2014/main" id="{3AE1444E-D801-28AE-1CA7-8061AF7A8F96}"/>
+                <a16:creationId xmlns:a16="http://schemas.microsoft.com/office/drawing/2014/main" id="{B98D7254-1D9C-B203-5949-ED2404F2C1DC}"/>
               </a:ext>
             </a:extLst>
           </p:cNvPr>
@@ -2425,7 +2425,7 @@
           <p:cNvPr id="3" name="コンテンツ プレースホルダー 2">
             <a:extLst>
               <a:ext uri="{FF2B5EF4-FFF2-40B4-BE49-F238E27FC236}">
-                <a16:creationId xmlns:a16="http://schemas.microsoft.com/office/drawing/2014/main" id="{246B0848-1999-45D9-A39A-2222BCC34E7B}"/>
+                <a16:creationId xmlns:a16="http://schemas.microsoft.com/office/drawing/2014/main" id="{9BAF4BB0-398B-944F-DA59-C32F81A19337}"/>
               </a:ext>
             </a:extLst>
           </p:cNvPr>
@@ -2547,7 +2547,7 @@
           <p:cNvPr id="4" name="テキスト プレースホルダー 3">
             <a:extLst>
               <a:ext uri="{FF2B5EF4-FFF2-40B4-BE49-F238E27FC236}">
-                <a16:creationId xmlns:a16="http://schemas.microsoft.com/office/drawing/2014/main" id="{53852929-E952-6A47-9C40-B25A36ECBDD1}"/>
+                <a16:creationId xmlns:a16="http://schemas.microsoft.com/office/drawing/2014/main" id="{0F8B3461-A04B-087E-D37B-96C9C77FB797}"/>
               </a:ext>
             </a:extLst>
           </p:cNvPr>
@@ -2618,7 +2618,7 @@
           <p:cNvPr id="5" name="日付プレースホルダー 4">
             <a:extLst>
               <a:ext uri="{FF2B5EF4-FFF2-40B4-BE49-F238E27FC236}">
-                <a16:creationId xmlns:a16="http://schemas.microsoft.com/office/drawing/2014/main" id="{BBECFA21-9CE2-C0F2-4F6A-51AFFC44FF72}"/>
+                <a16:creationId xmlns:a16="http://schemas.microsoft.com/office/drawing/2014/main" id="{166918A3-98D1-8FD0-5874-C8AC65DD9791}"/>
               </a:ext>
             </a:extLst>
           </p:cNvPr>
@@ -2634,7 +2634,7 @@
           <a:bodyPr/>
           <a:lstStyle/>
           <a:p>
-            <a:fld id="{9DF2A836-37ED-47CA-87A4-683513FCBB30}" type="datetimeFigureOut">
+            <a:fld id="{C1E45F56-CE77-4E74-8606-E77503B817BF}" type="datetimeFigureOut">
               <a:rPr kumimoji="1" lang="ja-JP" altLang="en-US" smtClean="0"/>
               <a:t>2026/7/30</a:t>
             </a:fld>
@@ -2647,7 +2647,7 @@
           <p:cNvPr id="6" name="フッター プレースホルダー 5">
             <a:extLst>
               <a:ext uri="{FF2B5EF4-FFF2-40B4-BE49-F238E27FC236}">
-                <a16:creationId xmlns:a16="http://schemas.microsoft.com/office/drawing/2014/main" id="{F5C8C4B4-AB09-6FB6-3A5A-D621BF6793E4}"/>
+                <a16:creationId xmlns:a16="http://schemas.microsoft.com/office/drawing/2014/main" id="{CD289D56-C64A-FED8-254A-BF5A95D911B1}"/>
               </a:ext>
             </a:extLst>
           </p:cNvPr>
@@ -2672,7 +2672,7 @@
           <p:cNvPr id="7" name="スライド番号プレースホルダー 6">
             <a:extLst>
               <a:ext uri="{FF2B5EF4-FFF2-40B4-BE49-F238E27FC236}">
-                <a16:creationId xmlns:a16="http://schemas.microsoft.com/office/drawing/2014/main" id="{839C7758-F678-4045-30D1-377668114049}"/>
+                <a16:creationId xmlns:a16="http://schemas.microsoft.com/office/drawing/2014/main" id="{11844AD0-AD1B-1790-DFCA-4347AA250936}"/>
               </a:ext>
             </a:extLst>
           </p:cNvPr>
@@ -2688,7 +2688,7 @@
           <a:bodyPr/>
           <a:lstStyle/>
           <a:p>
-            <a:fld id="{5F14EB4C-AC86-462B-B0D6-21F83665B7A5}" type="slidenum">
+            <a:fld id="{E2AC0EA4-A78B-42AF-AA75-2A56FB8ECFD9}" type="slidenum">
               <a:rPr kumimoji="1" lang="ja-JP" altLang="en-US" smtClean="0"/>
               <a:t>‹#›</a:t>
             </a:fld>
@@ -2699,7 +2699,7 @@
     </p:spTree>
     <p:extLst>
       <p:ext uri="{BB962C8B-B14F-4D97-AF65-F5344CB8AC3E}">
-        <p14:creationId xmlns:p14="http://schemas.microsoft.com/office/powerpoint/2010/main" val="397342669"/>
+        <p14:creationId xmlns:p14="http://schemas.microsoft.com/office/powerpoint/2010/main" val="3557780166"/>
       </p:ext>
     </p:extLst>
   </p:cSld>
@@ -2731,7 +2731,7 @@
           <p:cNvPr id="2" name="タイトル 1">
             <a:extLst>
               <a:ext uri="{FF2B5EF4-FFF2-40B4-BE49-F238E27FC236}">
-                <a16:creationId xmlns:a16="http://schemas.microsoft.com/office/drawing/2014/main" id="{9ED2C385-1838-B311-53A0-B93E6B7EB8C1}"/>
+                <a16:creationId xmlns:a16="http://schemas.microsoft.com/office/drawing/2014/main" id="{3D1303B6-2D4D-18E4-9F06-C39182791CEA}"/>
               </a:ext>
             </a:extLst>
           </p:cNvPr>
@@ -2768,7 +2768,7 @@
           <p:cNvPr id="3" name="図プレースホルダー 2">
             <a:extLst>
               <a:ext uri="{FF2B5EF4-FFF2-40B4-BE49-F238E27FC236}">
-                <a16:creationId xmlns:a16="http://schemas.microsoft.com/office/drawing/2014/main" id="{748F8883-F1CE-7DAA-686F-05580729CEF6}"/>
+                <a16:creationId xmlns:a16="http://schemas.microsoft.com/office/drawing/2014/main" id="{4E83F24A-F74A-BAAD-6240-A12204BF3661}"/>
               </a:ext>
             </a:extLst>
           </p:cNvPr>
@@ -2835,7 +2835,7 @@
           <p:cNvPr id="4" name="テキスト プレースホルダー 3">
             <a:extLst>
               <a:ext uri="{FF2B5EF4-FFF2-40B4-BE49-F238E27FC236}">
-                <a16:creationId xmlns:a16="http://schemas.microsoft.com/office/drawing/2014/main" id="{695863A0-739C-A673-54A3-931AA90DBE64}"/>
+                <a16:creationId xmlns:a16="http://schemas.microsoft.com/office/drawing/2014/main" id="{F54C6A07-14E4-ACCD-BAEA-B891507565D4}"/>
               </a:ext>
             </a:extLst>
           </p:cNvPr>
@@ -2906,7 +2906,7 @@
           <p:cNvPr id="5" name="日付プレースホルダー 4">
             <a:extLst>
               <a:ext uri="{FF2B5EF4-FFF2-40B4-BE49-F238E27FC236}">
-                <a16:creationId xmlns:a16="http://schemas.microsoft.com/office/drawing/2014/main" id="{8A32BA13-58ED-E83E-93D8-99DE975AD5B0}"/>
+                <a16:creationId xmlns:a16="http://schemas.microsoft.com/office/drawing/2014/main" id="{679F4392-453B-59D6-CAA4-0C441E9A4503}"/>
               </a:ext>
             </a:extLst>
           </p:cNvPr>
@@ -2922,7 +2922,7 @@
           <a:bodyPr/>
           <a:lstStyle/>
           <a:p>
-            <a:fld id="{9DF2A836-37ED-47CA-87A4-683513FCBB30}" type="datetimeFigureOut">
+            <a:fld id="{C1E45F56-CE77-4E74-8606-E77503B817BF}" type="datetimeFigureOut">
               <a:rPr kumimoji="1" lang="ja-JP" altLang="en-US" smtClean="0"/>
               <a:t>2026/7/30</a:t>
             </a:fld>
@@ -2935,7 +2935,7 @@
           <p:cNvPr id="6" name="フッター プレースホルダー 5">
             <a:extLst>
               <a:ext uri="{FF2B5EF4-FFF2-40B4-BE49-F238E27FC236}">
-                <a16:creationId xmlns:a16="http://schemas.microsoft.com/office/drawing/2014/main" id="{22DB1145-5983-48CA-D20E-431E29D400A9}"/>
+                <a16:creationId xmlns:a16="http://schemas.microsoft.com/office/drawing/2014/main" id="{7E22AC7E-9A11-70A7-2DEC-B84573047B1C}"/>
               </a:ext>
             </a:extLst>
           </p:cNvPr>
@@ -2960,7 +2960,7 @@
           <p:cNvPr id="7" name="スライド番号プレースホルダー 6">
             <a:extLst>
               <a:ext uri="{FF2B5EF4-FFF2-40B4-BE49-F238E27FC236}">
-                <a16:creationId xmlns:a16="http://schemas.microsoft.com/office/drawing/2014/main" id="{7516BF72-8C22-8059-AD09-610E05BEFCE0}"/>
+                <a16:creationId xmlns:a16="http://schemas.microsoft.com/office/drawing/2014/main" id="{4B051D0B-2182-2D7F-2CBE-0F8D67378EE8}"/>
               </a:ext>
             </a:extLst>
           </p:cNvPr>
@@ -2976,7 +2976,7 @@
           <a:bodyPr/>
           <a:lstStyle/>
           <a:p>
-            <a:fld id="{5F14EB4C-AC86-462B-B0D6-21F83665B7A5}" type="slidenum">
+            <a:fld id="{E2AC0EA4-A78B-42AF-AA75-2A56FB8ECFD9}" type="slidenum">
               <a:rPr kumimoji="1" lang="ja-JP" altLang="en-US" smtClean="0"/>
               <a:t>‹#›</a:t>
             </a:fld>
@@ -2987,7 +2987,7 @@
     </p:spTree>
     <p:extLst>
       <p:ext uri="{BB962C8B-B14F-4D97-AF65-F5344CB8AC3E}">
-        <p14:creationId xmlns:p14="http://schemas.microsoft.com/office/powerpoint/2010/main" val="2125986585"/>
+        <p14:creationId xmlns:p14="http://schemas.microsoft.com/office/powerpoint/2010/main" val="3693410446"/>
       </p:ext>
     </p:extLst>
   </p:cSld>
@@ -3024,7 +3024,7 @@
           <p:cNvPr id="2" name="タイトル プレースホルダー 1">
             <a:extLst>
               <a:ext uri="{FF2B5EF4-FFF2-40B4-BE49-F238E27FC236}">
-                <a16:creationId xmlns:a16="http://schemas.microsoft.com/office/drawing/2014/main" id="{E2D577EF-33DE-9A82-87CC-BE088FB0E008}"/>
+                <a16:creationId xmlns:a16="http://schemas.microsoft.com/office/drawing/2014/main" id="{1659F855-F114-9E07-2647-9BBF4EC1A6C4}"/>
               </a:ext>
             </a:extLst>
           </p:cNvPr>
@@ -3062,7 +3062,7 @@
           <p:cNvPr id="3" name="テキスト プレースホルダー 2">
             <a:extLst>
               <a:ext uri="{FF2B5EF4-FFF2-40B4-BE49-F238E27FC236}">
-                <a16:creationId xmlns:a16="http://schemas.microsoft.com/office/drawing/2014/main" id="{C4E30DCA-0E86-2EE5-A331-D5B0D2DAB15E}"/>
+                <a16:creationId xmlns:a16="http://schemas.microsoft.com/office/drawing/2014/main" id="{F3CD4FB6-8804-4724-258F-BB8150CE5416}"/>
               </a:ext>
             </a:extLst>
           </p:cNvPr>
@@ -3161,7 +3161,7 @@
           <p:cNvPr id="4" name="日付プレースホルダー 3">
             <a:extLst>
               <a:ext uri="{FF2B5EF4-FFF2-40B4-BE49-F238E27FC236}">
-                <a16:creationId xmlns:a16="http://schemas.microsoft.com/office/drawing/2014/main" id="{AE4CA313-D366-E796-07DA-E99553734B9B}"/>
+                <a16:creationId xmlns:a16="http://schemas.microsoft.com/office/drawing/2014/main" id="{C5E40220-10D0-32C6-9F6B-33C8F90D3D3B}"/>
               </a:ext>
             </a:extLst>
           </p:cNvPr>
@@ -3195,7 +3195,7 @@
             </a:lvl1pPr>
           </a:lstStyle>
           <a:p>
-            <a:fld id="{9DF2A836-37ED-47CA-87A4-683513FCBB30}" type="datetimeFigureOut">
+            <a:fld id="{C1E45F56-CE77-4E74-8606-E77503B817BF}" type="datetimeFigureOut">
               <a:rPr kumimoji="1" lang="ja-JP" altLang="en-US" smtClean="0"/>
               <a:t>2026/7/30</a:t>
             </a:fld>
@@ -3208,7 +3208,7 @@
           <p:cNvPr id="5" name="フッター プレースホルダー 4">
             <a:extLst>
               <a:ext uri="{FF2B5EF4-FFF2-40B4-BE49-F238E27FC236}">
-                <a16:creationId xmlns:a16="http://schemas.microsoft.com/office/drawing/2014/main" id="{F42DB0A6-28DA-D563-6583-8F6791094061}"/>
+                <a16:creationId xmlns:a16="http://schemas.microsoft.com/office/drawing/2014/main" id="{D3E55801-955D-7FFA-612E-5A8850704B58}"/>
               </a:ext>
             </a:extLst>
           </p:cNvPr>
@@ -3251,7 +3251,7 @@
           <p:cNvPr id="6" name="スライド番号プレースホルダー 5">
             <a:extLst>
               <a:ext uri="{FF2B5EF4-FFF2-40B4-BE49-F238E27FC236}">
-                <a16:creationId xmlns:a16="http://schemas.microsoft.com/office/drawing/2014/main" id="{834A7172-4C99-F04D-F0EA-1C3A32E829A8}"/>
+                <a16:creationId xmlns:a16="http://schemas.microsoft.com/office/drawing/2014/main" id="{1CAD0264-0DE0-66AE-0830-1930EB5B0C0D}"/>
               </a:ext>
             </a:extLst>
           </p:cNvPr>
@@ -3285,7 +3285,7 @@
             </a:lvl1pPr>
           </a:lstStyle>
           <a:p>
-            <a:fld id="{5F14EB4C-AC86-462B-B0D6-21F83665B7A5}" type="slidenum">
+            <a:fld id="{E2AC0EA4-A78B-42AF-AA75-2A56FB8ECFD9}" type="slidenum">
               <a:rPr kumimoji="1" lang="ja-JP" altLang="en-US" smtClean="0"/>
               <a:t>‹#›</a:t>
             </a:fld>
@@ -3296,7 +3296,7 @@
     </p:spTree>
     <p:extLst>
       <p:ext uri="{BB962C8B-B14F-4D97-AF65-F5344CB8AC3E}">
-        <p14:creationId xmlns:p14="http://schemas.microsoft.com/office/powerpoint/2010/main" val="1784323341"/>
+        <p14:creationId xmlns:p14="http://schemas.microsoft.com/office/powerpoint/2010/main" val="4173141358"/>
       </p:ext>
     </p:extLst>
   </p:cSld>
@@ -3619,7 +3619,7 @@
           <p:cNvPr id="2" name="テキスト ボックス 1">
             <a:extLst>
               <a:ext uri="{FF2B5EF4-FFF2-40B4-BE49-F238E27FC236}">
-                <a16:creationId xmlns:a16="http://schemas.microsoft.com/office/drawing/2014/main" id="{0CED6F63-D160-F572-1C3A-1F93182126A9}"/>
+                <a16:creationId xmlns:a16="http://schemas.microsoft.com/office/drawing/2014/main" id="{970F9909-F6E9-34B2-D65E-CE5F2B417424}"/>
               </a:ext>
             </a:extLst>
           </p:cNvPr>
@@ -3665,7 +3665,7 @@
           <p:cNvPr id="3" name="テキスト ボックス 2">
             <a:extLst>
               <a:ext uri="{FF2B5EF4-FFF2-40B4-BE49-F238E27FC236}">
-                <a16:creationId xmlns:a16="http://schemas.microsoft.com/office/drawing/2014/main" id="{6117CB03-D0B5-D8C2-C710-D94B35045A07}"/>
+                <a16:creationId xmlns:a16="http://schemas.microsoft.com/office/drawing/2014/main" id="{DCFC28EF-B41A-969E-F3A3-617E38532F23}"/>
               </a:ext>
             </a:extLst>
           </p:cNvPr>
@@ -3714,7 +3714,7 @@
           <p:cNvPr id="4" name="テキスト ボックス 3">
             <a:extLst>
               <a:ext uri="{FF2B5EF4-FFF2-40B4-BE49-F238E27FC236}">
-                <a16:creationId xmlns:a16="http://schemas.microsoft.com/office/drawing/2014/main" id="{48644B04-67DE-FAE8-0B17-78C2F2623A8F}"/>
+                <a16:creationId xmlns:a16="http://schemas.microsoft.com/office/drawing/2014/main" id="{FD26912E-B48E-1986-3102-7BB7E8C342CD}"/>
               </a:ext>
             </a:extLst>
           </p:cNvPr>
@@ -3754,7 +3754,7 @@
           <p:cNvPr id="5" name="テキスト ボックス 4">
             <a:extLst>
               <a:ext uri="{FF2B5EF4-FFF2-40B4-BE49-F238E27FC236}">
-                <a16:creationId xmlns:a16="http://schemas.microsoft.com/office/drawing/2014/main" id="{5243AC9B-8A6F-D67B-CCA7-C0CEAA0CA856}"/>
+                <a16:creationId xmlns:a16="http://schemas.microsoft.com/office/drawing/2014/main" id="{8F4F2F78-CFB8-1E4A-3FD9-70608BC6A128}"/>
               </a:ext>
             </a:extLst>
           </p:cNvPr>
@@ -3801,7 +3801,7 @@
             <a:hlinkClick r:id="" action="ppaction://media"/>
             <a:extLst>
               <a:ext uri="{FF2B5EF4-FFF2-40B4-BE49-F238E27FC236}">
-                <a16:creationId xmlns:a16="http://schemas.microsoft.com/office/drawing/2014/main" id="{5B57F01D-4E12-E6F2-CB11-F4B805F724BF}"/>
+                <a16:creationId xmlns:a16="http://schemas.microsoft.com/office/drawing/2014/main" id="{7C8616E7-54B9-1691-1EB9-01CD086365BA}"/>
               </a:ext>
             </a:extLst>
           </p:cNvPr>
@@ -3836,7 +3836,7 @@
     </p:spTree>
     <p:extLst>
       <p:ext uri="{BB962C8B-B14F-4D97-AF65-F5344CB8AC3E}">
-        <p14:creationId xmlns:p14="http://schemas.microsoft.com/office/powerpoint/2010/main" val="1103252554"/>
+        <p14:creationId xmlns:p14="http://schemas.microsoft.com/office/powerpoint/2010/main" val="986262496"/>
       </p:ext>
     </p:extLst>
   </p:cSld>
@@ -3960,7 +3960,7 @@
           <p:cNvPr id="2" name="テキスト ボックス 1">
             <a:extLst>
               <a:ext uri="{FF2B5EF4-FFF2-40B4-BE49-F238E27FC236}">
-                <a16:creationId xmlns:a16="http://schemas.microsoft.com/office/drawing/2014/main" id="{E83C9AC3-188F-EB48-C75C-4905ACA214C3}"/>
+                <a16:creationId xmlns:a16="http://schemas.microsoft.com/office/drawing/2014/main" id="{B6844AFA-BEEB-CC36-9115-9ECE4BC3A2F0}"/>
               </a:ext>
             </a:extLst>
           </p:cNvPr>
@@ -4006,7 +4006,7 @@
           <p:cNvPr id="3" name="テキスト ボックス 2">
             <a:extLst>
               <a:ext uri="{FF2B5EF4-FFF2-40B4-BE49-F238E27FC236}">
-                <a16:creationId xmlns:a16="http://schemas.microsoft.com/office/drawing/2014/main" id="{AE7F4F70-6815-BE8E-300B-42AFE7160A58}"/>
+                <a16:creationId xmlns:a16="http://schemas.microsoft.com/office/drawing/2014/main" id="{FBDBA0B3-7B22-3CCB-50AA-869FF81C7E0A}"/>
               </a:ext>
             </a:extLst>
           </p:cNvPr>
@@ -4046,7 +4046,7 @@
           <p:cNvPr id="4" name="テキスト ボックス 3">
             <a:extLst>
               <a:ext uri="{FF2B5EF4-FFF2-40B4-BE49-F238E27FC236}">
-                <a16:creationId xmlns:a16="http://schemas.microsoft.com/office/drawing/2014/main" id="{D56B0FF4-CBF2-E105-C36B-1BA5223D798B}"/>
+                <a16:creationId xmlns:a16="http://schemas.microsoft.com/office/drawing/2014/main" id="{34493716-A48E-66CA-01E9-F159F4556657}"/>
               </a:ext>
             </a:extLst>
           </p:cNvPr>
@@ -4095,7 +4095,7 @@
           <p:cNvPr id="5" name="テキスト ボックス 4">
             <a:extLst>
               <a:ext uri="{FF2B5EF4-FFF2-40B4-BE49-F238E27FC236}">
-                <a16:creationId xmlns:a16="http://schemas.microsoft.com/office/drawing/2014/main" id="{460DEE6B-6691-0F44-BB6D-D5D79CC0C6F8}"/>
+                <a16:creationId xmlns:a16="http://schemas.microsoft.com/office/drawing/2014/main" id="{CC275EB2-7B43-7E4D-A7A9-DC9D4EC7169B}"/>
               </a:ext>
             </a:extLst>
           </p:cNvPr>
@@ -4142,7 +4142,7 @@
             <a:hlinkClick r:id="" action="ppaction://media"/>
             <a:extLst>
               <a:ext uri="{FF2B5EF4-FFF2-40B4-BE49-F238E27FC236}">
-                <a16:creationId xmlns:a16="http://schemas.microsoft.com/office/drawing/2014/main" id="{20062992-B539-CCC3-86F8-40EE17414957}"/>
+                <a16:creationId xmlns:a16="http://schemas.microsoft.com/office/drawing/2014/main" id="{E66D7EF0-2048-CC63-6141-137320D2C7E8}"/>
               </a:ext>
             </a:extLst>
           </p:cNvPr>
@@ -4177,7 +4177,7 @@
     </p:spTree>
     <p:extLst>
       <p:ext uri="{BB962C8B-B14F-4D97-AF65-F5344CB8AC3E}">
-        <p14:creationId xmlns:p14="http://schemas.microsoft.com/office/powerpoint/2010/main" val="91771424"/>
+        <p14:creationId xmlns:p14="http://schemas.microsoft.com/office/powerpoint/2010/main" val="4062319537"/>
       </p:ext>
     </p:extLst>
   </p:cSld>
@@ -4301,7 +4301,7 @@
           <p:cNvPr id="2" name="テキスト ボックス 1">
             <a:extLst>
               <a:ext uri="{FF2B5EF4-FFF2-40B4-BE49-F238E27FC236}">
-                <a16:creationId xmlns:a16="http://schemas.microsoft.com/office/drawing/2014/main" id="{A00A0DC3-6DA1-6E8A-F8CB-92EAFFD19FF2}"/>
+                <a16:creationId xmlns:a16="http://schemas.microsoft.com/office/drawing/2014/main" id="{6CFD6C93-6861-2751-4CFF-57E65B7E5997}"/>
               </a:ext>
             </a:extLst>
           </p:cNvPr>
@@ -4347,7 +4347,7 @@
           <p:cNvPr id="3" name="テキスト ボックス 2">
             <a:extLst>
               <a:ext uri="{FF2B5EF4-FFF2-40B4-BE49-F238E27FC236}">
-                <a16:creationId xmlns:a16="http://schemas.microsoft.com/office/drawing/2014/main" id="{2BD1FEB9-618D-59D9-43B6-D3F38F309DA3}"/>
+                <a16:creationId xmlns:a16="http://schemas.microsoft.com/office/drawing/2014/main" id="{2AD5CBF8-4135-0765-7502-7C506D096F51}"/>
               </a:ext>
             </a:extLst>
           </p:cNvPr>
@@ -4387,7 +4387,7 @@
           <p:cNvPr id="4" name="テキスト ボックス 3">
             <a:extLst>
               <a:ext uri="{FF2B5EF4-FFF2-40B4-BE49-F238E27FC236}">
-                <a16:creationId xmlns:a16="http://schemas.microsoft.com/office/drawing/2014/main" id="{B9EF2702-2DD5-EA8A-E794-737D4CCEC28F}"/>
+                <a16:creationId xmlns:a16="http://schemas.microsoft.com/office/drawing/2014/main" id="{F70E56DB-A08F-48EE-54BE-28FED9F3F9DD}"/>
               </a:ext>
             </a:extLst>
           </p:cNvPr>
@@ -4446,7 +4446,7 @@
           <p:cNvPr id="5" name="テキスト ボックス 4">
             <a:extLst>
               <a:ext uri="{FF2B5EF4-FFF2-40B4-BE49-F238E27FC236}">
-                <a16:creationId xmlns:a16="http://schemas.microsoft.com/office/drawing/2014/main" id="{273AB12D-AB4C-5F4D-C7FE-20BF014A7F1E}"/>
+                <a16:creationId xmlns:a16="http://schemas.microsoft.com/office/drawing/2014/main" id="{E8BAF5D3-7ACA-17C9-30CE-25D7532C40F3}"/>
               </a:ext>
             </a:extLst>
           </p:cNvPr>
@@ -4493,7 +4493,7 @@
             <a:hlinkClick r:id="" action="ppaction://media"/>
             <a:extLst>
               <a:ext uri="{FF2B5EF4-FFF2-40B4-BE49-F238E27FC236}">
-                <a16:creationId xmlns:a16="http://schemas.microsoft.com/office/drawing/2014/main" id="{1A35CEAB-1659-04FB-8C61-B73E262DC108}"/>
+                <a16:creationId xmlns:a16="http://schemas.microsoft.com/office/drawing/2014/main" id="{FAA5CA01-CD78-7E91-8070-9F396E3DB621}"/>
               </a:ext>
             </a:extLst>
           </p:cNvPr>
@@ -4528,7 +4528,7 @@
     </p:spTree>
     <p:extLst>
       <p:ext uri="{BB962C8B-B14F-4D97-AF65-F5344CB8AC3E}">
-        <p14:creationId xmlns:p14="http://schemas.microsoft.com/office/powerpoint/2010/main" val="509104066"/>
+        <p14:creationId xmlns:p14="http://schemas.microsoft.com/office/powerpoint/2010/main" val="3460112266"/>
       </p:ext>
     </p:extLst>
   </p:cSld>
@@ -4652,7 +4652,7 @@
           <p:cNvPr id="2" name="テキスト ボックス 1">
             <a:extLst>
               <a:ext uri="{FF2B5EF4-FFF2-40B4-BE49-F238E27FC236}">
-                <a16:creationId xmlns:a16="http://schemas.microsoft.com/office/drawing/2014/main" id="{F3F4EB8D-0077-3D3D-7497-6C3BCF377F4B}"/>
+                <a16:creationId xmlns:a16="http://schemas.microsoft.com/office/drawing/2014/main" id="{FDCC928A-2FE6-099D-5796-DE2FA76230EB}"/>
               </a:ext>
             </a:extLst>
           </p:cNvPr>
@@ -4698,7 +4698,7 @@
           <p:cNvPr id="3" name="テキスト ボックス 2">
             <a:extLst>
               <a:ext uri="{FF2B5EF4-FFF2-40B4-BE49-F238E27FC236}">
-                <a16:creationId xmlns:a16="http://schemas.microsoft.com/office/drawing/2014/main" id="{1581BDA7-ECF1-4EEF-1971-EAC34784F106}"/>
+                <a16:creationId xmlns:a16="http://schemas.microsoft.com/office/drawing/2014/main" id="{9A1D92EE-0B8E-B2D7-1797-1B0B7DA9F1E8}"/>
               </a:ext>
             </a:extLst>
           </p:cNvPr>
@@ -4738,7 +4738,7 @@
           <p:cNvPr id="4" name="テキスト ボックス 3">
             <a:extLst>
               <a:ext uri="{FF2B5EF4-FFF2-40B4-BE49-F238E27FC236}">
-                <a16:creationId xmlns:a16="http://schemas.microsoft.com/office/drawing/2014/main" id="{166037B1-854F-35E0-5843-30C9A6763DE8}"/>
+                <a16:creationId xmlns:a16="http://schemas.microsoft.com/office/drawing/2014/main" id="{9C33208B-D33D-A3E0-2D74-AD7A5C5FBA37}"/>
               </a:ext>
             </a:extLst>
           </p:cNvPr>
@@ -4830,7 +4830,7 @@
           <p:cNvPr id="5" name="テキスト ボックス 4">
             <a:extLst>
               <a:ext uri="{FF2B5EF4-FFF2-40B4-BE49-F238E27FC236}">
-                <a16:creationId xmlns:a16="http://schemas.microsoft.com/office/drawing/2014/main" id="{6AC42BC2-2BDB-0FF8-FBA2-D50BE99B3367}"/>
+                <a16:creationId xmlns:a16="http://schemas.microsoft.com/office/drawing/2014/main" id="{35D99A25-7C6A-B439-96FD-38086F2B3F1C}"/>
               </a:ext>
             </a:extLst>
           </p:cNvPr>
@@ -4877,7 +4877,7 @@
             <a:hlinkClick r:id="" action="ppaction://media"/>
             <a:extLst>
               <a:ext uri="{FF2B5EF4-FFF2-40B4-BE49-F238E27FC236}">
-                <a16:creationId xmlns:a16="http://schemas.microsoft.com/office/drawing/2014/main" id="{A39F1641-0E78-6942-CAAF-E2E18ED829CD}"/>
+                <a16:creationId xmlns:a16="http://schemas.microsoft.com/office/drawing/2014/main" id="{2CA31BD1-4D73-5440-2B5B-935F124390CD}"/>
               </a:ext>
             </a:extLst>
           </p:cNvPr>
@@ -4912,7 +4912,7 @@
     </p:spTree>
     <p:extLst>
       <p:ext uri="{BB962C8B-B14F-4D97-AF65-F5344CB8AC3E}">
-        <p14:creationId xmlns:p14="http://schemas.microsoft.com/office/powerpoint/2010/main" val="4077208023"/>
+        <p14:creationId xmlns:p14="http://schemas.microsoft.com/office/powerpoint/2010/main" val="3968106169"/>
       </p:ext>
     </p:extLst>
   </p:cSld>
@@ -5036,7 +5036,7 @@
           <p:cNvPr id="2" name="テキスト ボックス 1">
             <a:extLst>
               <a:ext uri="{FF2B5EF4-FFF2-40B4-BE49-F238E27FC236}">
-                <a16:creationId xmlns:a16="http://schemas.microsoft.com/office/drawing/2014/main" id="{11C6FA1B-CB29-93FF-4CE8-67ECD8167F2B}"/>
+                <a16:creationId xmlns:a16="http://schemas.microsoft.com/office/drawing/2014/main" id="{DC2AA9EA-9829-D6F5-A482-800BDCA0DD33}"/>
               </a:ext>
             </a:extLst>
           </p:cNvPr>
@@ -5082,7 +5082,7 @@
           <p:cNvPr id="3" name="テキスト ボックス 2">
             <a:extLst>
               <a:ext uri="{FF2B5EF4-FFF2-40B4-BE49-F238E27FC236}">
-                <a16:creationId xmlns:a16="http://schemas.microsoft.com/office/drawing/2014/main" id="{8B446CA2-8EBF-A4AE-E466-71CFE0C2FED0}"/>
+                <a16:creationId xmlns:a16="http://schemas.microsoft.com/office/drawing/2014/main" id="{0711E395-A283-E02D-7625-02FFD6797733}"/>
               </a:ext>
             </a:extLst>
           </p:cNvPr>
@@ -5122,7 +5122,7 @@
           <p:cNvPr id="4" name="テキスト ボックス 3">
             <a:extLst>
               <a:ext uri="{FF2B5EF4-FFF2-40B4-BE49-F238E27FC236}">
-                <a16:creationId xmlns:a16="http://schemas.microsoft.com/office/drawing/2014/main" id="{59915D83-6C14-76C3-8FD5-3512C7EB5A06}"/>
+                <a16:creationId xmlns:a16="http://schemas.microsoft.com/office/drawing/2014/main" id="{3F098E50-4565-5AE8-DEA6-27578836EB5B}"/>
               </a:ext>
             </a:extLst>
           </p:cNvPr>
@@ -5146,20 +5146,14 @@
           <a:lstStyle/>
           <a:p>
             <a:r>
-              <a:rPr kumimoji="1" lang="en-US" altLang="ja-JP" sz="2000">
+              <a:rPr kumimoji="1" lang="ja-JP" altLang="en-US" sz="2000">
                 <a:solidFill>
                   <a:srgbClr val="333333"/>
                 </a:solidFill>
                 <a:latin typeface="Arial" panose="020B0604020202020204" pitchFamily="34" charset="0"/>
               </a:rPr>
-              <a:t>Fix silently-broken budget filter codes (B004/B005/B006 no longer exist)</a:t>
-            </a:r>
-            <a:endParaRPr kumimoji="1" lang="ja-JP" altLang="en-US" sz="2000">
-              <a:solidFill>
-                <a:srgbClr val="333333"/>
-              </a:solidFill>
-              <a:latin typeface="Arial" panose="020B0604020202020204" pitchFamily="34" charset="0"/>
-            </a:endParaRPr>
+              <a:t>直近のコミットでは、不具合修正と安定性向上が行われました。</a:t>
+            </a:r>
           </a:p>
         </p:txBody>
       </p:sp>
@@ -5168,7 +5162,7 @@
           <p:cNvPr id="5" name="テキスト ボックス 4">
             <a:extLst>
               <a:ext uri="{FF2B5EF4-FFF2-40B4-BE49-F238E27FC236}">
-                <a16:creationId xmlns:a16="http://schemas.microsoft.com/office/drawing/2014/main" id="{E868ECCE-F14D-3E89-9190-BDDB8581DD0B}"/>
+                <a16:creationId xmlns:a16="http://schemas.microsoft.com/office/drawing/2014/main" id="{C98A4CD4-7B8B-8375-0318-635723C568AF}"/>
               </a:ext>
             </a:extLst>
           </p:cNvPr>
@@ -5215,7 +5209,7 @@
             <a:hlinkClick r:id="" action="ppaction://media"/>
             <a:extLst>
               <a:ext uri="{FF2B5EF4-FFF2-40B4-BE49-F238E27FC236}">
-                <a16:creationId xmlns:a16="http://schemas.microsoft.com/office/drawing/2014/main" id="{50189C95-E2BF-BE27-A121-5F69DB4C2BB5}"/>
+                <a16:creationId xmlns:a16="http://schemas.microsoft.com/office/drawing/2014/main" id="{CFC57A62-B5EA-2DE7-91BD-D39C02A82E93}"/>
               </a:ext>
             </a:extLst>
           </p:cNvPr>
@@ -5250,7 +5244,7 @@
     </p:spTree>
     <p:extLst>
       <p:ext uri="{BB962C8B-B14F-4D97-AF65-F5344CB8AC3E}">
-        <p14:creationId xmlns:p14="http://schemas.microsoft.com/office/powerpoint/2010/main" val="296527800"/>
+        <p14:creationId xmlns:p14="http://schemas.microsoft.com/office/powerpoint/2010/main" val="664026235"/>
       </p:ext>
     </p:extLst>
   </p:cSld>
@@ -5259,10 +5253,10 @@
   </p:clrMapOvr>
   <mc:AlternateContent xmlns:mc="http://schemas.openxmlformats.org/markup-compatibility/2006">
     <mc:Choice xmlns:p14="http://schemas.microsoft.com/office/powerpoint/2010/main" Requires="p14">
-      <p:transition spd="slow" p14:dur="2000" advTm="12000"/>
+      <p:transition spd="slow" p14:dur="2000" advTm="6000"/>
     </mc:Choice>
     <mc:Fallback>
-      <p:transition spd="slow" advTm="12000"/>
+      <p:transition spd="slow" advTm="6000"/>
     </mc:Fallback>
   </mc:AlternateContent>
   <p:timing>
@@ -5293,7 +5287,7 @@
                                   <p:childTnLst>
                                     <p:cmd type="call" cmd="playFrom(0.0)">
                                       <p:cBhvr>
-                                        <p:cTn id="6" dur="11739" fill="hold"/>
+                                        <p:cTn id="6" dur="5771" fill="hold"/>
                                         <p:tgtEl>
                                           <p:spTgt spid="6"/>
                                         </p:tgtEl>
@@ -5374,7 +5368,7 @@
           <p:cNvPr id="2" name="テキスト ボックス 1">
             <a:extLst>
               <a:ext uri="{FF2B5EF4-FFF2-40B4-BE49-F238E27FC236}">
-                <a16:creationId xmlns:a16="http://schemas.microsoft.com/office/drawing/2014/main" id="{D26C5862-6ED0-720C-1F34-1B07DC986D5A}"/>
+                <a16:creationId xmlns:a16="http://schemas.microsoft.com/office/drawing/2014/main" id="{DB026F30-3E47-0BF4-8A2C-A5F86FD3443A}"/>
               </a:ext>
             </a:extLst>
           </p:cNvPr>
@@ -5420,7 +5414,7 @@
           <p:cNvPr id="3" name="テキスト ボックス 2">
             <a:extLst>
               <a:ext uri="{FF2B5EF4-FFF2-40B4-BE49-F238E27FC236}">
-                <a16:creationId xmlns:a16="http://schemas.microsoft.com/office/drawing/2014/main" id="{966C54C3-CDC9-0802-8BFE-F777FD5A05DB}"/>
+                <a16:creationId xmlns:a16="http://schemas.microsoft.com/office/drawing/2014/main" id="{7DFF4154-675D-8622-C7F7-D8DDEEF52884}"/>
               </a:ext>
             </a:extLst>
           </p:cNvPr>
@@ -5460,7 +5454,7 @@
           <p:cNvPr id="4" name="テキスト ボックス 3">
             <a:extLst>
               <a:ext uri="{FF2B5EF4-FFF2-40B4-BE49-F238E27FC236}">
-                <a16:creationId xmlns:a16="http://schemas.microsoft.com/office/drawing/2014/main" id="{30F6E76B-61A4-B475-F0CF-6B428CB1810D}"/>
+                <a16:creationId xmlns:a16="http://schemas.microsoft.com/office/drawing/2014/main" id="{40A02B94-BF48-D166-0459-B5862C6EEEED}"/>
               </a:ext>
             </a:extLst>
           </p:cNvPr>
@@ -5525,7 +5519,7 @@
           <p:cNvPr id="5" name="テキスト ボックス 4">
             <a:extLst>
               <a:ext uri="{FF2B5EF4-FFF2-40B4-BE49-F238E27FC236}">
-                <a16:creationId xmlns:a16="http://schemas.microsoft.com/office/drawing/2014/main" id="{4C9BCDBC-48A4-F07C-23AD-1B6E9F2256A3}"/>
+                <a16:creationId xmlns:a16="http://schemas.microsoft.com/office/drawing/2014/main" id="{A726027D-CEA8-8FBD-0898-D3EB56BC3778}"/>
               </a:ext>
             </a:extLst>
           </p:cNvPr>
@@ -5572,7 +5566,7 @@
             <a:hlinkClick r:id="" action="ppaction://media"/>
             <a:extLst>
               <a:ext uri="{FF2B5EF4-FFF2-40B4-BE49-F238E27FC236}">
-                <a16:creationId xmlns:a16="http://schemas.microsoft.com/office/drawing/2014/main" id="{298FB83D-B4EC-E03D-4217-D5E0BB85779E}"/>
+                <a16:creationId xmlns:a16="http://schemas.microsoft.com/office/drawing/2014/main" id="{0017E1B5-F600-B0BB-B80C-BD052DF03FBD}"/>
               </a:ext>
             </a:extLst>
           </p:cNvPr>
@@ -5607,7 +5601,7 @@
     </p:spTree>
     <p:extLst>
       <p:ext uri="{BB962C8B-B14F-4D97-AF65-F5344CB8AC3E}">
-        <p14:creationId xmlns:p14="http://schemas.microsoft.com/office/powerpoint/2010/main" val="4224741510"/>
+        <p14:creationId xmlns:p14="http://schemas.microsoft.com/office/powerpoint/2010/main" val="2246204629"/>
       </p:ext>
     </p:extLst>
   </p:cSld>
